--- a/classes/parte-17-profundizacion-para-certificaciones/324-operaciones-de-seguridad-hardening-y-gestion-de-configuracion/clase-324-presentacion.pptx
+++ b/classes/parte-17-profundizacion-para-certificaciones/324-operaciones-de-seguridad-hardening-y-gestion-de-configuracion/clase-324-presentacion.pptx
@@ -17,6 +17,10 @@
     <p:sldId id="265" r:id="rId16"/>
     <p:sldId id="266" r:id="rId17"/>
     <p:sldId id="267" r:id="rId18"/>
+    <p:sldId id="268" r:id="rId19"/>
+    <p:sldId id="269" r:id="rId20"/>
+    <p:sldId id="270" r:id="rId21"/>
+    <p:sldId id="271" r:id="rId22"/>
   </p:sldIdLst>
   <p:sldSz cx="9144000" cy="6858000" type="screen4x3"/>
   <p:notesSz cx="6858000" cy="9144000"/>
@@ -3198,7 +3202,7 @@
                   <a:srgbClr val="0B3D2E"/>
                 </a:solidFill>
               </a:rPr>
-              <a:t>⚠️ Errores comunes</a:t>
+              <a:t>🧪 Laboratorio guiado — Aplicar un CIS Benchmark con gestión del cambio</a:t>
             </a:r>
           </a:p>
         </p:txBody>
@@ -3236,82 +3240,97 @@
                   <a:srgbClr val="22282E"/>
                 </a:solidFill>
               </a:rPr>
-              <a:t>•  "Apliqué el benchmark y el sistema dejó de funcionar" — Endureciste sin probar. Usa snapshot, aplica por lotes y prueba funcionalidad antes de producción.</a:t>
-            </a:r>
-          </a:p>
-          <a:p>
-            <a:pPr>
-              <a:spcAft>
-                <a:spcPts val="600"/>
-              </a:spcAft>
-            </a:pPr>
-            <a:r>
-              <a:rPr sz="1500">
-                <a:solidFill>
-                  <a:srgbClr val="22282E"/>
-                </a:solidFill>
-              </a:rPr>
-              <a:t>•  "Cada servidor está configurado distinto" — Hardening manual = deriva. Aplica desde una fuente de verdad (IaC/GPO) idempotente.</a:t>
-            </a:r>
-          </a:p>
-          <a:p>
-            <a:pPr>
-              <a:spcAft>
-                <a:spcPts val="600"/>
-              </a:spcAft>
-            </a:pPr>
-            <a:r>
-              <a:rPr sz="1500">
-                <a:solidFill>
-                  <a:srgbClr val="22282E"/>
-                </a:solidFill>
-              </a:rPr>
-              <a:t>•  "Instalamos todos los parches de golpe y algo se rompió" — Falta priorización y prueba. Prioriza por riesgo y valida en laboratorio antes del despliegue.</a:t>
-            </a:r>
-          </a:p>
-          <a:p>
-            <a:pPr>
-              <a:spcAft>
-                <a:spcPts val="600"/>
-              </a:spcAft>
-            </a:pPr>
-            <a:r>
-              <a:rPr sz="1500">
-                <a:solidFill>
-                  <a:srgbClr val="22282E"/>
-                </a:solidFill>
-              </a:rPr>
-              <a:t>•  "Cambié la config a mano y nadie se enteró" — Sin gestión del cambio hay drift invisible. Todo cambio pasa por RFC y queda registrado.</a:t>
-            </a:r>
-          </a:p>
-          <a:p>
-            <a:pPr>
-              <a:spcAft>
-                <a:spcPts val="600"/>
-              </a:spcAft>
-            </a:pPr>
-            <a:r>
-              <a:rPr sz="1500">
-                <a:solidFill>
-                  <a:srgbClr val="22282E"/>
-                </a:solidFill>
-              </a:rPr>
-              <a:t>•  "El benchmark exige algo que rompe una app crítica" — No fuerces L2 donde no toca. Documenta una excepción con control compensatorio y aprueba el riesgo.</a:t>
-            </a:r>
-          </a:p>
-          <a:p>
-            <a:pPr>
-              <a:spcAft>
-                <a:spcPts val="600"/>
-              </a:spcAft>
-            </a:pPr>
-            <a:r>
-              <a:rPr sz="1500">
-                <a:solidFill>
-                  <a:srgbClr val="22282E"/>
-                </a:solidFill>
-              </a:rPr>
-              <a:t>•  "Medimos cumplimiento una vez al año" — El cumplimiento se degrada. Implementa monitoreo continuo (SP 800-137) para vigilar la baseline.</a:t>
+              <a:t>•  Ejercicio aplicado: endureces una VM siguiendo un CIS Benchmark, controlando el proceso con gestión de configuración y del cambio.</a:t>
+            </a:r>
+          </a:p>
+          <a:p>
+            <a:pPr>
+              <a:spcAft>
+                <a:spcPts val="600"/>
+              </a:spcAft>
+            </a:pPr>
+            <a:r>
+              <a:rPr sz="1500">
+                <a:solidFill>
+                  <a:srgbClr val="22282E"/>
+                </a:solidFill>
+              </a:rPr>
+              <a:t>•  Toma la línea base actual. En la VM aislada, ejecuta un escaneo inicial (CIS-CAT Lite, OpenSCAP o Lynis) y guarda el porcentaje de cumplimiento y los hallazgos. Haz un snapshot.</a:t>
+            </a:r>
+          </a:p>
+          <a:p>
+            <a:pPr>
+              <a:spcAft>
+                <a:spcPts val="600"/>
+              </a:spcAft>
+            </a:pPr>
+            <a:r>
+              <a:rPr sz="1500">
+                <a:solidFill>
+                  <a:srgbClr val="22282E"/>
+                </a:solidFill>
+              </a:rPr>
+              <a:t>•  Selecciona el benchmark y nivel. Descarga el CIS Benchmark de la plataforma y elige nivel (L1 para un servidor de propósito general). Justifica por qué L1 y no L2.</a:t>
+            </a:r>
+          </a:p>
+          <a:p>
+            <a:pPr>
+              <a:spcAft>
+                <a:spcPts val="600"/>
+              </a:spcAft>
+            </a:pPr>
+            <a:r>
+              <a:rPr sz="1500">
+                <a:solidFill>
+                  <a:srgbClr val="22282E"/>
+                </a:solidFill>
+              </a:rPr>
+              <a:t>•  Abre un RFC. Registra el cambio: qué recomendaciones se aplicarán, riesgo, ventana, plan de pruebas y plan de rollback (restaurar snapshot). Simula la aprobación del CAB.</a:t>
+            </a:r>
+          </a:p>
+          <a:p>
+            <a:pPr>
+              <a:spcAft>
+                <a:spcPts val="600"/>
+              </a:spcAft>
+            </a:pPr>
+            <a:r>
+              <a:rPr sz="1500">
+                <a:solidFill>
+                  <a:srgbClr val="22282E"/>
+                </a:solidFill>
+              </a:rPr>
+              <a:t>•  Aplica el hardening por lotes. Implementa un grupo de recomendaciones (p. ej. políticas de contraseña, desactivar servicios innecesarios, cerrar puertos, deshabilitar cuentas por defecto) con…</a:t>
+            </a:r>
+          </a:p>
+          <a:p>
+            <a:pPr>
+              <a:spcAft>
+                <a:spcPts val="600"/>
+              </a:spcAft>
+            </a:pPr>
+            <a:r>
+              <a:rPr sz="1500">
+                <a:solidFill>
+                  <a:srgbClr val="22282E"/>
+                </a:solidFill>
+              </a:rPr>
+              <a:t>•  Reescanea y compara. Vuelve a medir el cumplimiento y confirma la mejora. Documenta qué recomendaciones no se aplicaron y por qué (excepciones justificadas).</a:t>
+            </a:r>
+          </a:p>
+          <a:p>
+            <a:pPr>
+              <a:spcAft>
+                <a:spcPts val="600"/>
+              </a:spcAft>
+            </a:pPr>
+            <a:r>
+              <a:rPr sz="1500">
+                <a:solidFill>
+                  <a:srgbClr val="22282E"/>
+                </a:solidFill>
+              </a:rPr>
+              <a:t>•  Prueba la funcionalidad. Verifica que los servicios legítimos siguen operando. Si algo se rompe, ejecuta el rollback y ajusta la excepción: así se demuestra el valor de la gestión del cambio.</a:t>
             </a:r>
           </a:p>
         </p:txBody>
@@ -3362,7 +3381,7 @@
                   <a:srgbClr val="0B3D2E"/>
                 </a:solidFill>
               </a:rPr>
-              <a:t>❓ Preguntas frecuentes</a:t>
+              <a:t>✍️ Ejercicios</a:t>
             </a:r>
           </a:p>
         </p:txBody>
@@ -3400,97 +3419,82 @@
                   <a:srgbClr val="22282E"/>
                 </a:solidFill>
               </a:rPr>
-              <a:t>•  ❓ ¿CIS Benchmark nivel 1 o nivel 2?</a:t>
-            </a:r>
-          </a:p>
-          <a:p>
-            <a:pPr>
-              <a:spcAft>
-                <a:spcPts val="600"/>
-              </a:spcAft>
-            </a:pPr>
-            <a:r>
-              <a:rPr sz="1500">
-                <a:solidFill>
-                  <a:srgbClr val="22282E"/>
-                </a:solidFill>
-              </a:rPr>
-              <a:t>•  L1 aplica controles prudentes que rara vez rompen funcionalidad y sirve como base para casi todo. L2 añade defensa en profundidad para entornos sensibles, a costa de posibles impactos de compatibilidad. Empieza en L1 y sube donde el riesgo lo justifique.</a:t>
-            </a:r>
-          </a:p>
-          <a:p>
-            <a:pPr>
-              <a:spcAft>
-                <a:spcPts val="600"/>
-              </a:spcAft>
-            </a:pPr>
-            <a:r>
-              <a:rPr sz="1500">
-                <a:solidFill>
-                  <a:srgbClr val="22282E"/>
-                </a:solidFill>
-              </a:rPr>
-              <a:t>•  ❓ ¿Debo aplicar todas las recomendaciones del benchmark?</a:t>
-            </a:r>
-          </a:p>
-          <a:p>
-            <a:pPr>
-              <a:spcAft>
-                <a:spcPts val="600"/>
-              </a:spcAft>
-            </a:pPr>
-            <a:r>
-              <a:rPr sz="1500">
-                <a:solidFill>
-                  <a:srgbClr val="22282E"/>
-                </a:solidFill>
-              </a:rPr>
-              <a:t>•  No a ciegas. Cada recomendación se evalúa contra tu contexto; las que rompan operaciones legítimas se gestionan como excepción documentada con un control compensatorio, no se ignoran en silencio.</a:t>
-            </a:r>
-          </a:p>
-          <a:p>
-            <a:pPr>
-              <a:spcAft>
-                <a:spcPts val="600"/>
-              </a:spcAft>
-            </a:pPr>
-            <a:r>
-              <a:rPr sz="1500">
-                <a:solidFill>
-                  <a:srgbClr val="22282E"/>
-                </a:solidFill>
-              </a:rPr>
-              <a:t>•  ❓ ¿Cómo evito la deriva de configuración?</a:t>
-            </a:r>
-          </a:p>
-          <a:p>
-            <a:pPr>
-              <a:spcAft>
-                <a:spcPts val="600"/>
-              </a:spcAft>
-            </a:pPr>
-            <a:r>
-              <a:rPr sz="1500">
-                <a:solidFill>
-                  <a:srgbClr val="22282E"/>
-                </a:solidFill>
-              </a:rPr>
-              <a:t>•  Definiendo la configuración como código (IaC/GPO/DSC) desde una fuente de verdad, aplicándola de forma idempotente y verificando continuamente con un escáner. Cuando aparece drift, se reaplica la configuración canónica.</a:t>
-            </a:r>
-          </a:p>
-          <a:p>
-            <a:pPr>
-              <a:spcAft>
-                <a:spcPts val="600"/>
-              </a:spcAft>
-            </a:pPr>
-            <a:r>
-              <a:rPr sz="1500">
-                <a:solidFill>
-                  <a:srgbClr val="22282E"/>
-                </a:solidFill>
-              </a:rPr>
-              <a:t>•  ❓ ¿Parchear rápido o parchear seguro?</a:t>
+              <a:t>•  Justifica cuándo elegir CIS nivel L1 y cuándo L2 para tres tipos de servidor.</a:t>
+            </a:r>
+          </a:p>
+          <a:p>
+            <a:pPr>
+              <a:spcAft>
+                <a:spcPts val="600"/>
+              </a:spcAft>
+            </a:pPr>
+            <a:r>
+              <a:rPr sz="1500">
+                <a:solidFill>
+                  <a:srgbClr val="22282E"/>
+                </a:solidFill>
+              </a:rPr>
+              <a:t>•  Redacta un RFC completo (cambio, riesgo, ventana, pruebas, rollback) para desactivar SMBv1 en una flota.</a:t>
+            </a:r>
+          </a:p>
+          <a:p>
+            <a:pPr>
+              <a:spcAft>
+                <a:spcPts val="600"/>
+              </a:spcAft>
+            </a:pPr>
+            <a:r>
+              <a:rPr sz="1500">
+                <a:solidFill>
+                  <a:srgbClr val="22282E"/>
+                </a:solidFill>
+              </a:rPr>
+              <a:t>•  Escribe una tarea de Ansible/GPO que aplique tres recomendaciones de hardening y sea idempotente.</a:t>
+            </a:r>
+          </a:p>
+          <a:p>
+            <a:pPr>
+              <a:spcAft>
+                <a:spcPts val="600"/>
+              </a:spcAft>
+            </a:pPr>
+            <a:r>
+              <a:rPr sz="1500">
+                <a:solidFill>
+                  <a:srgbClr val="22282E"/>
+                </a:solidFill>
+              </a:rPr>
+              <a:t>•  Diseña un flujo de detección de drift: qué se escanea, cada cuánto y cómo se corrige.</a:t>
+            </a:r>
+          </a:p>
+          <a:p>
+            <a:pPr>
+              <a:spcAft>
+                <a:spcPts val="600"/>
+              </a:spcAft>
+            </a:pPr>
+            <a:r>
+              <a:rPr sz="1500">
+                <a:solidFill>
+                  <a:srgbClr val="22282E"/>
+                </a:solidFill>
+              </a:rPr>
+              <a:t>•  Prioriza cinco parches por riesgo (CVSS + explotación + exposición) y define su ventana.</a:t>
+            </a:r>
+          </a:p>
+          <a:p>
+            <a:pPr>
+              <a:spcAft>
+                <a:spcPts val="600"/>
+              </a:spcAft>
+            </a:pPr>
+            <a:r>
+              <a:rPr sz="1500">
+                <a:solidFill>
+                  <a:srgbClr val="22282E"/>
+                </a:solidFill>
+              </a:rPr>
+              <a:t>•  Documenta una excepción de baseline justificada y su compensación (control alternativo).</a:t>
             </a:r>
           </a:p>
         </p:txBody>
@@ -3541,7 +3545,7 @@
                   <a:srgbClr val="0B3D2E"/>
                 </a:solidFill>
               </a:rPr>
-              <a:t>🔗 Referencias</a:t>
+              <a:t>📝 Reto verificable</a:t>
             </a:r>
           </a:p>
         </p:txBody>
@@ -3579,6 +3583,543 @@
                   <a:srgbClr val="22282E"/>
                 </a:solidFill>
               </a:rPr>
+              <a:t>•  Reto: entrega el paquete de hardening de una VM controlado por gestión del cambio, con evidencia de mejora y de control de drift.</a:t>
+            </a:r>
+          </a:p>
+          <a:p>
+            <a:pPr>
+              <a:spcAft>
+                <a:spcPts val="600"/>
+              </a:spcAft>
+            </a:pPr>
+            <a:r>
+              <a:rPr sz="1500">
+                <a:solidFill>
+                  <a:srgbClr val="22282E"/>
+                </a:solidFill>
+              </a:rPr>
+              <a:t>•  Criterio de aceptación:</a:t>
+            </a:r>
+          </a:p>
+          <a:p>
+            <a:pPr>
+              <a:spcAft>
+                <a:spcPts val="600"/>
+              </a:spcAft>
+            </a:pPr>
+            <a:r>
+              <a:rPr sz="1500">
+                <a:solidFill>
+                  <a:srgbClr val="22282E"/>
+                </a:solidFill>
+              </a:rPr>
+              <a:t>•  Hay medición de cumplimiento inicial y final contra un CIS Benchmark, con mejora demostrada.</a:t>
+            </a:r>
+          </a:p>
+          <a:p>
+            <a:pPr>
+              <a:spcAft>
+                <a:spcPts val="600"/>
+              </a:spcAft>
+            </a:pPr>
+            <a:r>
+              <a:rPr sz="1500">
+                <a:solidFill>
+                  <a:srgbClr val="22282E"/>
+                </a:solidFill>
+              </a:rPr>
+              <a:t>•  El hardening se aplicó de forma repetible (Ansible/GPO/DSC/IaC), no manual, y la baseline quedó versionada.</a:t>
+            </a:r>
+          </a:p>
+          <a:p>
+            <a:pPr>
+              <a:spcAft>
+                <a:spcPts val="600"/>
+              </a:spcAft>
+            </a:pPr>
+            <a:r>
+              <a:rPr sz="1500">
+                <a:solidFill>
+                  <a:srgbClr val="22282E"/>
+                </a:solidFill>
+              </a:rPr>
+              <a:t>•  Existe un RFC con riesgo, ventana, pruebas y plan de rollback, más una lista de excepciones justificadas.</a:t>
+            </a:r>
+          </a:p>
+          <a:p>
+            <a:pPr>
+              <a:spcAft>
+                <a:spcPts val="600"/>
+              </a:spcAft>
+            </a:pPr>
+            <a:r>
+              <a:rPr sz="1500">
+                <a:solidFill>
+                  <a:srgbClr val="22282E"/>
+                </a:solidFill>
+              </a:rPr>
+              <a:t>•  Se detectó y corrigió al menos un caso de configuration drift desde la fuente de verdad.</a:t>
+            </a:r>
+          </a:p>
+          <a:p>
+            <a:pPr>
+              <a:spcAft>
+                <a:spcPts val="600"/>
+              </a:spcAft>
+            </a:pPr>
+            <a:r>
+              <a:rPr sz="1500">
+                <a:solidFill>
+                  <a:srgbClr val="22282E"/>
+                </a:solidFill>
+              </a:rPr>
+              <a:t>•  El ciclo incluye gestión de parches con priorización por riesgo y ventana documentada (SP 800-40).</a:t>
+            </a:r>
+          </a:p>
+        </p:txBody>
+      </p:sp>
+    </p:spTree>
+  </p:cSld>
+  <p:clrMapOvr>
+    <a:masterClrMapping/>
+  </p:clrMapOvr>
+</p:sld>
+</file>
+
+<file path=ppt/slides/slide13.xml><?xml version="1.0" encoding="utf-8"?>
+<p:sld xmlns:a="http://schemas.openxmlformats.org/drawingml/2006/main" xmlns:p="http://schemas.openxmlformats.org/presentationml/2006/main" xmlns:r="http://schemas.openxmlformats.org/officeDocument/2006/relationships">
+  <p:cSld>
+    <p:spTree>
+      <p:nvGrpSpPr>
+        <p:cNvPr id="1" name=""/>
+        <p:cNvGrpSpPr/>
+        <p:nvPr/>
+      </p:nvGrpSpPr>
+      <p:grpSpPr/>
+      <p:sp>
+        <p:nvSpPr>
+          <p:cNvPr id="2" name="TextBox 1"/>
+          <p:cNvSpPr txBox="1"/>
+          <p:nvPr/>
+        </p:nvSpPr>
+        <p:spPr>
+          <a:xfrm>
+            <a:off x="457200" y="320040"/>
+            <a:ext cx="8229600" cy="822960"/>
+          </a:xfrm>
+          <a:prstGeom prst="rect">
+            <a:avLst/>
+          </a:prstGeom>
+          <a:noFill/>
+        </p:spPr>
+        <p:txBody>
+          <a:bodyPr wrap="square">
+            <a:spAutoFit/>
+          </a:bodyPr>
+          <a:lstStyle/>
+          <a:p>
+            <a:r>
+              <a:rPr sz="2600" b="1">
+                <a:solidFill>
+                  <a:srgbClr val="0B3D2E"/>
+                </a:solidFill>
+              </a:rPr>
+              <a:t>⚠️ Errores comunes</a:t>
+            </a:r>
+          </a:p>
+        </p:txBody>
+      </p:sp>
+      <p:sp>
+        <p:nvSpPr>
+          <p:cNvPr id="3" name="TextBox 2"/>
+          <p:cNvSpPr txBox="1"/>
+          <p:nvPr/>
+        </p:nvSpPr>
+        <p:spPr>
+          <a:xfrm>
+            <a:off x="457200" y="1280160"/>
+            <a:ext cx="8229600" cy="4937760"/>
+          </a:xfrm>
+          <a:prstGeom prst="rect">
+            <a:avLst/>
+          </a:prstGeom>
+          <a:noFill/>
+        </p:spPr>
+        <p:txBody>
+          <a:bodyPr wrap="square">
+            <a:spAutoFit/>
+          </a:bodyPr>
+          <a:lstStyle/>
+          <a:p>
+            <a:pPr>
+              <a:spcAft>
+                <a:spcPts val="600"/>
+              </a:spcAft>
+            </a:pPr>
+            <a:r>
+              <a:rPr sz="1500">
+                <a:solidFill>
+                  <a:srgbClr val="22282E"/>
+                </a:solidFill>
+              </a:rPr>
+              <a:t>•  "Apliqué el benchmark y el sistema dejó de funcionar" — Endureciste sin probar. Usa snapshot, aplica por lotes y prueba funcionalidad antes de producción.</a:t>
+            </a:r>
+          </a:p>
+          <a:p>
+            <a:pPr>
+              <a:spcAft>
+                <a:spcPts val="600"/>
+              </a:spcAft>
+            </a:pPr>
+            <a:r>
+              <a:rPr sz="1500">
+                <a:solidFill>
+                  <a:srgbClr val="22282E"/>
+                </a:solidFill>
+              </a:rPr>
+              <a:t>•  "Cada servidor está configurado distinto" — Hardening manual = deriva. Aplica desde una fuente de verdad (IaC/GPO) idempotente.</a:t>
+            </a:r>
+          </a:p>
+          <a:p>
+            <a:pPr>
+              <a:spcAft>
+                <a:spcPts val="600"/>
+              </a:spcAft>
+            </a:pPr>
+            <a:r>
+              <a:rPr sz="1500">
+                <a:solidFill>
+                  <a:srgbClr val="22282E"/>
+                </a:solidFill>
+              </a:rPr>
+              <a:t>•  "Instalamos todos los parches de golpe y algo se rompió" — Falta priorización y prueba. Prioriza por riesgo y valida en laboratorio antes del despliegue.</a:t>
+            </a:r>
+          </a:p>
+          <a:p>
+            <a:pPr>
+              <a:spcAft>
+                <a:spcPts val="600"/>
+              </a:spcAft>
+            </a:pPr>
+            <a:r>
+              <a:rPr sz="1500">
+                <a:solidFill>
+                  <a:srgbClr val="22282E"/>
+                </a:solidFill>
+              </a:rPr>
+              <a:t>•  "Cambié la config a mano y nadie se enteró" — Sin gestión del cambio hay drift invisible. Todo cambio pasa por RFC y queda registrado.</a:t>
+            </a:r>
+          </a:p>
+          <a:p>
+            <a:pPr>
+              <a:spcAft>
+                <a:spcPts val="600"/>
+              </a:spcAft>
+            </a:pPr>
+            <a:r>
+              <a:rPr sz="1500">
+                <a:solidFill>
+                  <a:srgbClr val="22282E"/>
+                </a:solidFill>
+              </a:rPr>
+              <a:t>•  "El benchmark exige algo que rompe una app crítica" — No fuerces L2 donde no toca. Documenta una excepción con control compensatorio y aprueba el riesgo.</a:t>
+            </a:r>
+          </a:p>
+          <a:p>
+            <a:pPr>
+              <a:spcAft>
+                <a:spcPts val="600"/>
+              </a:spcAft>
+            </a:pPr>
+            <a:r>
+              <a:rPr sz="1500">
+                <a:solidFill>
+                  <a:srgbClr val="22282E"/>
+                </a:solidFill>
+              </a:rPr>
+              <a:t>•  "Medimos cumplimiento una vez al año" — El cumplimiento se degrada. Implementa monitoreo continuo (SP 800-137) para vigilar la baseline.</a:t>
+            </a:r>
+          </a:p>
+        </p:txBody>
+      </p:sp>
+    </p:spTree>
+  </p:cSld>
+  <p:clrMapOvr>
+    <a:masterClrMapping/>
+  </p:clrMapOvr>
+</p:sld>
+</file>
+
+<file path=ppt/slides/slide14.xml><?xml version="1.0" encoding="utf-8"?>
+<p:sld xmlns:a="http://schemas.openxmlformats.org/drawingml/2006/main" xmlns:p="http://schemas.openxmlformats.org/presentationml/2006/main" xmlns:r="http://schemas.openxmlformats.org/officeDocument/2006/relationships">
+  <p:cSld>
+    <p:spTree>
+      <p:nvGrpSpPr>
+        <p:cNvPr id="1" name=""/>
+        <p:cNvGrpSpPr/>
+        <p:nvPr/>
+      </p:nvGrpSpPr>
+      <p:grpSpPr/>
+      <p:sp>
+        <p:nvSpPr>
+          <p:cNvPr id="2" name="TextBox 1"/>
+          <p:cNvSpPr txBox="1"/>
+          <p:nvPr/>
+        </p:nvSpPr>
+        <p:spPr>
+          <a:xfrm>
+            <a:off x="457200" y="320040"/>
+            <a:ext cx="8229600" cy="822960"/>
+          </a:xfrm>
+          <a:prstGeom prst="rect">
+            <a:avLst/>
+          </a:prstGeom>
+          <a:noFill/>
+        </p:spPr>
+        <p:txBody>
+          <a:bodyPr wrap="square">
+            <a:spAutoFit/>
+          </a:bodyPr>
+          <a:lstStyle/>
+          <a:p>
+            <a:r>
+              <a:rPr sz="2600" b="1">
+                <a:solidFill>
+                  <a:srgbClr val="0B3D2E"/>
+                </a:solidFill>
+              </a:rPr>
+              <a:t>❓ Preguntas frecuentes</a:t>
+            </a:r>
+          </a:p>
+        </p:txBody>
+      </p:sp>
+      <p:sp>
+        <p:nvSpPr>
+          <p:cNvPr id="3" name="TextBox 2"/>
+          <p:cNvSpPr txBox="1"/>
+          <p:nvPr/>
+        </p:nvSpPr>
+        <p:spPr>
+          <a:xfrm>
+            <a:off x="457200" y="1280160"/>
+            <a:ext cx="8229600" cy="4937760"/>
+          </a:xfrm>
+          <a:prstGeom prst="rect">
+            <a:avLst/>
+          </a:prstGeom>
+          <a:noFill/>
+        </p:spPr>
+        <p:txBody>
+          <a:bodyPr wrap="square">
+            <a:spAutoFit/>
+          </a:bodyPr>
+          <a:lstStyle/>
+          <a:p>
+            <a:pPr>
+              <a:spcAft>
+                <a:spcPts val="600"/>
+              </a:spcAft>
+            </a:pPr>
+            <a:r>
+              <a:rPr sz="1500">
+                <a:solidFill>
+                  <a:srgbClr val="22282E"/>
+                </a:solidFill>
+              </a:rPr>
+              <a:t>•  ❓ ¿CIS Benchmark nivel 1 o nivel 2?</a:t>
+            </a:r>
+          </a:p>
+          <a:p>
+            <a:pPr>
+              <a:spcAft>
+                <a:spcPts val="600"/>
+              </a:spcAft>
+            </a:pPr>
+            <a:r>
+              <a:rPr sz="1500">
+                <a:solidFill>
+                  <a:srgbClr val="22282E"/>
+                </a:solidFill>
+              </a:rPr>
+              <a:t>•  L1 aplica controles prudentes que rara vez rompen funcionalidad y sirve como base para casi todo. L2 añade defensa en profundidad para entornos sensibles, a costa de posibles impactos de…</a:t>
+            </a:r>
+          </a:p>
+          <a:p>
+            <a:pPr>
+              <a:spcAft>
+                <a:spcPts val="600"/>
+              </a:spcAft>
+            </a:pPr>
+            <a:r>
+              <a:rPr sz="1500">
+                <a:solidFill>
+                  <a:srgbClr val="22282E"/>
+                </a:solidFill>
+              </a:rPr>
+              <a:t>•  ❓ ¿Debo aplicar todas las recomendaciones del benchmark?</a:t>
+            </a:r>
+          </a:p>
+          <a:p>
+            <a:pPr>
+              <a:spcAft>
+                <a:spcPts val="600"/>
+              </a:spcAft>
+            </a:pPr>
+            <a:r>
+              <a:rPr sz="1500">
+                <a:solidFill>
+                  <a:srgbClr val="22282E"/>
+                </a:solidFill>
+              </a:rPr>
+              <a:t>•  No a ciegas. Cada recomendación se evalúa contra tu contexto; las que rompan operaciones legítimas se gestionan como excepción documentada con un control compensatorio, no se ignoran en silencio.</a:t>
+            </a:r>
+          </a:p>
+          <a:p>
+            <a:pPr>
+              <a:spcAft>
+                <a:spcPts val="600"/>
+              </a:spcAft>
+            </a:pPr>
+            <a:r>
+              <a:rPr sz="1500">
+                <a:solidFill>
+                  <a:srgbClr val="22282E"/>
+                </a:solidFill>
+              </a:rPr>
+              <a:t>•  ❓ ¿Cómo evito la deriva de configuración?</a:t>
+            </a:r>
+          </a:p>
+          <a:p>
+            <a:pPr>
+              <a:spcAft>
+                <a:spcPts val="600"/>
+              </a:spcAft>
+            </a:pPr>
+            <a:r>
+              <a:rPr sz="1500">
+                <a:solidFill>
+                  <a:srgbClr val="22282E"/>
+                </a:solidFill>
+              </a:rPr>
+              <a:t>•  Definiendo la configuración como código (IaC/GPO/DSC) desde una fuente de verdad, aplicándola de forma idempotente y verificando continuamente con un escáner. Cuando aparece drift, se reaplica la…</a:t>
+            </a:r>
+          </a:p>
+          <a:p>
+            <a:pPr>
+              <a:spcAft>
+                <a:spcPts val="600"/>
+              </a:spcAft>
+            </a:pPr>
+            <a:r>
+              <a:rPr sz="1500">
+                <a:solidFill>
+                  <a:srgbClr val="22282E"/>
+                </a:solidFill>
+              </a:rPr>
+              <a:t>•  ❓ ¿Parchear rápido o parchear seguro?</a:t>
+            </a:r>
+          </a:p>
+        </p:txBody>
+      </p:sp>
+    </p:spTree>
+  </p:cSld>
+  <p:clrMapOvr>
+    <a:masterClrMapping/>
+  </p:clrMapOvr>
+</p:sld>
+</file>
+
+<file path=ppt/slides/slide15.xml><?xml version="1.0" encoding="utf-8"?>
+<p:sld xmlns:a="http://schemas.openxmlformats.org/drawingml/2006/main" xmlns:p="http://schemas.openxmlformats.org/presentationml/2006/main" xmlns:r="http://schemas.openxmlformats.org/officeDocument/2006/relationships">
+  <p:cSld>
+    <p:spTree>
+      <p:nvGrpSpPr>
+        <p:cNvPr id="1" name=""/>
+        <p:cNvGrpSpPr/>
+        <p:nvPr/>
+      </p:nvGrpSpPr>
+      <p:grpSpPr/>
+      <p:sp>
+        <p:nvSpPr>
+          <p:cNvPr id="2" name="TextBox 1"/>
+          <p:cNvSpPr txBox="1"/>
+          <p:nvPr/>
+        </p:nvSpPr>
+        <p:spPr>
+          <a:xfrm>
+            <a:off x="457200" y="320040"/>
+            <a:ext cx="8229600" cy="822960"/>
+          </a:xfrm>
+          <a:prstGeom prst="rect">
+            <a:avLst/>
+          </a:prstGeom>
+          <a:noFill/>
+        </p:spPr>
+        <p:txBody>
+          <a:bodyPr wrap="square">
+            <a:spAutoFit/>
+          </a:bodyPr>
+          <a:lstStyle/>
+          <a:p>
+            <a:r>
+              <a:rPr sz="2600" b="1">
+                <a:solidFill>
+                  <a:srgbClr val="0B3D2E"/>
+                </a:solidFill>
+              </a:rPr>
+              <a:t>🔗 Referencias</a:t>
+            </a:r>
+          </a:p>
+        </p:txBody>
+      </p:sp>
+      <p:sp>
+        <p:nvSpPr>
+          <p:cNvPr id="3" name="TextBox 2"/>
+          <p:cNvSpPr txBox="1"/>
+          <p:nvPr/>
+        </p:nvSpPr>
+        <p:spPr>
+          <a:xfrm>
+            <a:off x="457200" y="1280160"/>
+            <a:ext cx="8229600" cy="4937760"/>
+          </a:xfrm>
+          <a:prstGeom prst="rect">
+            <a:avLst/>
+          </a:prstGeom>
+          <a:noFill/>
+        </p:spPr>
+        <p:txBody>
+          <a:bodyPr wrap="square">
+            <a:spAutoFit/>
+          </a:bodyPr>
+          <a:lstStyle/>
+          <a:p>
+            <a:pPr>
+              <a:spcAft>
+                <a:spcPts val="600"/>
+              </a:spcAft>
+            </a:pPr>
+            <a:r>
+              <a:rPr sz="1500">
+                <a:solidFill>
+                  <a:srgbClr val="22282E"/>
+                </a:solidFill>
+              </a:rPr>
+              <a:t>•  🏢 En la empresa: gestión de parches con Microsoft WSUS/SCCM (MECM), Intune o Ansible; verificación de baselines con CIS-CAT y benchmarks CIS.</a:t>
+            </a:r>
+          </a:p>
+          <a:p>
+            <a:pPr>
+              <a:spcAft>
+                <a:spcPts val="600"/>
+              </a:spcAft>
+            </a:pPr>
+            <a:r>
+              <a:rPr sz="1500">
+                <a:solidFill>
+                  <a:srgbClr val="22282E"/>
+                </a:solidFill>
+              </a:rPr>
               <a:t>•  CompTIA. Security+ (SY0-701) Exam Objectives — dominio Security Operations.</a:t>
             </a:r>
           </a:p>
@@ -3644,6 +4185,81 @@
           </a:p>
         </p:txBody>
       </p:sp>
+    </p:spTree>
+  </p:cSld>
+  <p:clrMapOvr>
+    <a:masterClrMapping/>
+  </p:clrMapOvr>
+</p:sld>
+</file>
+
+<file path=ppt/slides/slide16.xml><?xml version="1.0" encoding="utf-8"?>
+<p:sld xmlns:a="http://schemas.openxmlformats.org/drawingml/2006/main" xmlns:p="http://schemas.openxmlformats.org/presentationml/2006/main" xmlns:r="http://schemas.openxmlformats.org/officeDocument/2006/relationships">
+  <p:cSld>
+    <p:spTree>
+      <p:nvGrpSpPr>
+        <p:cNvPr id="1" name=""/>
+        <p:cNvGrpSpPr/>
+        <p:nvPr/>
+      </p:nvGrpSpPr>
+      <p:grpSpPr/>
+      <p:sp>
+        <p:nvSpPr>
+          <p:cNvPr id="2" name="TextBox 1"/>
+          <p:cNvSpPr txBox="1"/>
+          <p:nvPr/>
+        </p:nvSpPr>
+        <p:spPr>
+          <a:xfrm>
+            <a:off x="457200" y="274320"/>
+            <a:ext cx="8229600" cy="640080"/>
+          </a:xfrm>
+          <a:prstGeom prst="rect">
+            <a:avLst/>
+          </a:prstGeom>
+          <a:noFill/>
+        </p:spPr>
+        <p:txBody>
+          <a:bodyPr wrap="square">
+            <a:spAutoFit/>
+          </a:bodyPr>
+          <a:lstStyle/>
+          <a:p>
+            <a:r>
+              <a:rPr sz="2200" b="1">
+                <a:solidFill>
+                  <a:srgbClr val="0B3D2E"/>
+                </a:solidFill>
+              </a:rPr>
+              <a:t>Diagrama de la clase</a:t>
+            </a:r>
+          </a:p>
+        </p:txBody>
+      </p:sp>
+      <p:pic>
+        <p:nvPicPr>
+          <p:cNvPr id="3" name="Picture 2" descr="ed59f1b3fda1f969.png"/>
+          <p:cNvPicPr>
+            <a:picLocks noChangeAspect="1"/>
+          </p:cNvPicPr>
+          <p:nvPr/>
+        </p:nvPicPr>
+        <p:blipFill>
+          <a:blip r:embed="rId2"/>
+          <a:stretch>
+            <a:fillRect/>
+          </a:stretch>
+        </p:blipFill>
+        <p:spPr>
+          <a:xfrm>
+            <a:off x="457200" y="3315903"/>
+            <a:ext cx="8229600" cy="866273"/>
+          </a:xfrm>
+          <a:prstGeom prst="rect">
+            <a:avLst/>
+          </a:prstGeom>
+        </p:spPr>
+      </p:pic>
     </p:spTree>
   </p:cSld>
   <p:clrMapOvr>
@@ -3728,7 +4344,7 @@
                   <a:srgbClr val="22282E"/>
                 </a:solidFill>
               </a:rPr>
-              <a:t>•  Reducir la superficie de ataque antes de que llegue el atacante. Esta clase cubre las operaciones de seguridad del día a día: establecer baselines con CIS Benchmarks, mantener la gestión de configuración segura (evitar la deriva/drift), operar un programa de gestión de parches con NIST SP 800-40, integrar la gestión del cambio para que el hardening no rompa el negocio, y aplicar hardening de sistemas operativos y servicios. Es el corazón de Security Operations en Security+ y CISSP.</a:t>
+              <a:t>•  Reducir la superficie de ataque antes de que llegue el atacante. Esta clase cubre las operaciones de seguridad del día a día: establecer baselines con CIS Benchmarks, mantener la gestión de…</a:t>
             </a:r>
           </a:p>
         </p:txBody>
@@ -4122,7 +4738,7 @@
                   <a:srgbClr val="0B3D2E"/>
                 </a:solidFill>
               </a:rPr>
-              <a:t>📖 Definiciones y características</a:t>
+              <a:t>🧠 Modelo mental y caso de decisión</a:t>
             </a:r>
           </a:p>
         </p:txBody>
@@ -4160,97 +4776,22 @@
                   <a:srgbClr val="22282E"/>
                 </a:solidFill>
               </a:rPr>
-              <a:t>•  Baseline de seguridad: conjunto mínimo y documentado de ajustes de configuración que define el estado "seguro conocido" de un sistema. Característica clave: es el punto de referencia contra el que se mide la deriva y el cumplimiento.</a:t>
-            </a:r>
-          </a:p>
-          <a:p>
-            <a:pPr>
-              <a:spcAft>
-                <a:spcPts val="600"/>
-              </a:spcAft>
-            </a:pPr>
-            <a:r>
-              <a:rPr sz="1500">
-                <a:solidFill>
-                  <a:srgbClr val="22282E"/>
-                </a:solidFill>
-              </a:rPr>
-              <a:t>•  CIS Benchmark: guía de hardening consensuada por la comunidad, específica por plataforma (Windows, Linux, navegadores, nube), con recomendaciones justificadas y verificables. Característica clave: define niveles —L1 (seguridad práctica sin romper funcionalidad) y L2 (defensa profunda para entornos sensibles).</a:t>
-            </a:r>
-          </a:p>
-          <a:p>
-            <a:pPr>
-              <a:spcAft>
-                <a:spcPts val="600"/>
-              </a:spcAft>
-            </a:pPr>
-            <a:r>
-              <a:rPr sz="1500">
-                <a:solidFill>
-                  <a:srgbClr val="22282E"/>
-                </a:solidFill>
-              </a:rPr>
-              <a:t>•  Hardening: proceso de reducir la superficie de ataque —desactivar servicios/puertos innecesarios, cerrar cuentas por defecto, aplicar mínimo privilegio, cifrar. Característica clave: menos funciones expuestas = menos vías de ataque.</a:t>
-            </a:r>
-          </a:p>
-          <a:p>
-            <a:pPr>
-              <a:spcAft>
-                <a:spcPts val="600"/>
-              </a:spcAft>
-            </a:pPr>
-            <a:r>
-              <a:rPr sz="1500">
-                <a:solidFill>
-                  <a:srgbClr val="22282E"/>
-                </a:solidFill>
-              </a:rPr>
-              <a:t>•  Configuration drift (deriva): divergencia gradual de la configuración real respecto de la baseline por cambios manuales no controlados. Característica clave: reintroduce riesgo silenciosamente; se combate con gestión de configuración y monitoreo.</a:t>
-            </a:r>
-          </a:p>
-          <a:p>
-            <a:pPr>
-              <a:spcAft>
-                <a:spcPts val="600"/>
-              </a:spcAft>
-            </a:pPr>
-            <a:r>
-              <a:rPr sz="1500">
-                <a:solidFill>
-                  <a:srgbClr val="22282E"/>
-                </a:solidFill>
-              </a:rPr>
-              <a:t>•  Gestión de parches: proceso de identificar, priorizar, probar, desplegar y verificar actualizaciones (NIST SP 800-40). Característica clave: no es "instalar todo ya"; prioriza por riesgo y valida antes de producción.</a:t>
-            </a:r>
-          </a:p>
-          <a:p>
-            <a:pPr>
-              <a:spcAft>
-                <a:spcPts val="600"/>
-              </a:spcAft>
-            </a:pPr>
-            <a:r>
-              <a:rPr sz="1500">
-                <a:solidFill>
-                  <a:srgbClr val="22282E"/>
-                </a:solidFill>
-              </a:rPr>
-              <a:t>•  Gestión del cambio: proceso formal (RFC → evaluación → aprobación del CAB → implementación → verificación → rollback si falla). Característica clave: cada cambio queda autorizado, documentado y reversible.</a:t>
-            </a:r>
-          </a:p>
-          <a:p>
-            <a:pPr>
-              <a:spcAft>
-                <a:spcPts val="600"/>
-              </a:spcAft>
-            </a:pPr>
-            <a:r>
-              <a:rPr sz="1500">
-                <a:solidFill>
-                  <a:srgbClr val="22282E"/>
-                </a:solidFill>
-              </a:rPr>
-              <a:t>•  CAB (Change Advisory Board): comité que evalúa y aprueba cambios según riesgo e impacto. Característica clave: separa la decisión de la ejecución y evita cambios sorpresa en producción.</a:t>
+              <a:t>•  Hardening define estado deseado, despliega, verifica deriva y gestiona excepciones; una imagen inicial no basta.</a:t>
+            </a:r>
+          </a:p>
+          <a:p>
+            <a:pPr>
+              <a:spcAft>
+                <a:spcPts val="600"/>
+              </a:spcAft>
+            </a:pPr>
+            <a:r>
+              <a:rPr sz="1500">
+                <a:solidFill>
+                  <a:srgbClr val="22282E"/>
+                </a:solidFill>
+              </a:rPr>
+              <a:t>•  Caso razonado. Una excepción temporal queda permanente. Caducidad y dueño la devuelven a decisión.</a:t>
             </a:r>
           </a:p>
         </p:txBody>
@@ -4301,7 +4842,7 @@
                   <a:srgbClr val="0B3D2E"/>
                 </a:solidFill>
               </a:rPr>
-              <a:t>🧰 Herramientas y preparación</a:t>
+              <a:t>📔 Glosario operativo complementario</a:t>
             </a:r>
           </a:p>
         </p:txBody>
@@ -4339,82 +4880,52 @@
                   <a:srgbClr val="22282E"/>
                 </a:solidFill>
               </a:rPr>
-              <a:t>•  Entorno de laboratorio propio con máquinas de prueba (nunca producción sin autorización):</a:t>
-            </a:r>
-          </a:p>
-          <a:p>
-            <a:pPr>
-              <a:spcAft>
-                <a:spcPts val="600"/>
-              </a:spcAft>
-            </a:pPr>
-            <a:r>
-              <a:rPr sz="1500">
-                <a:solidFill>
-                  <a:srgbClr val="22282E"/>
-                </a:solidFill>
-              </a:rPr>
-              <a:t>•  VM de prueba (Windows Server o Ubuntu) aislada para aplicar y revertir cambios con snapshots.</a:t>
-            </a:r>
-          </a:p>
-          <a:p>
-            <a:pPr>
-              <a:spcAft>
-                <a:spcPts val="600"/>
-              </a:spcAft>
-            </a:pPr>
-            <a:r>
-              <a:rPr sz="1500">
-                <a:solidFill>
-                  <a:srgbClr val="22282E"/>
-                </a:solidFill>
-              </a:rPr>
-              <a:t>•  CIS Benchmark correspondiente (PDF gratuito) y, si está disponible, CIS-CAT Lite para evaluar cumplimiento automáticamente.</a:t>
-            </a:r>
-          </a:p>
-          <a:p>
-            <a:pPr>
-              <a:spcAft>
-                <a:spcPts val="600"/>
-              </a:spcAft>
-            </a:pPr>
-            <a:r>
-              <a:rPr sz="1500">
-                <a:solidFill>
-                  <a:srgbClr val="22282E"/>
-                </a:solidFill>
-              </a:rPr>
-              <a:t>•  Herramienta de configuración: Ansible/PowerShell DSC o GPO para aplicar el hardening de forma repetible.</a:t>
-            </a:r>
-          </a:p>
-          <a:p>
-            <a:pPr>
-              <a:spcAft>
-                <a:spcPts val="600"/>
-              </a:spcAft>
-            </a:pPr>
-            <a:r>
-              <a:rPr sz="1500">
-                <a:solidFill>
-                  <a:srgbClr val="22282E"/>
-                </a:solidFill>
-              </a:rPr>
-              <a:t>•  Escáner de configuración: OpenSCAP (perfiles SCAP) o Lynis en Linux para medir el estado.</a:t>
-            </a:r>
-          </a:p>
-          <a:p>
-            <a:pPr>
-              <a:spcAft>
-                <a:spcPts val="600"/>
-              </a:spcAft>
-            </a:pPr>
-            <a:r>
-              <a:rPr sz="1500">
-                <a:solidFill>
-                  <a:srgbClr val="22282E"/>
-                </a:solidFill>
-              </a:rPr>
-              <a:t>•  Registro de cambios (RFC) y plantilla de gestión del cambio con plan de rollback.</a:t>
+              <a:t>•  Término — Definición</a:t>
+            </a:r>
+          </a:p>
+          <a:p>
+            <a:pPr>
+              <a:spcAft>
+                <a:spcPts val="600"/>
+              </a:spcAft>
+            </a:pPr>
+            <a:r>
+              <a:rPr sz="1500">
+                <a:solidFill>
+                  <a:srgbClr val="22282E"/>
+                </a:solidFill>
+              </a:rPr>
+              <a:t>•  Evidencia — Información cuya procedencia y relación con un criterio pueden revisarse.</a:t>
+            </a:r>
+          </a:p>
+          <a:p>
+            <a:pPr>
+              <a:spcAft>
+                <a:spcPts val="600"/>
+              </a:spcAft>
+            </a:pPr>
+            <a:r>
+              <a:rPr sz="1500">
+                <a:solidFill>
+                  <a:srgbClr val="22282E"/>
+                </a:solidFill>
+              </a:rPr>
+              <a:t>•  Supuesto — Condición declarada de la que depende una conclusión.</a:t>
+            </a:r>
+          </a:p>
+          <a:p>
+            <a:pPr>
+              <a:spcAft>
+                <a:spcPts val="600"/>
+              </a:spcAft>
+            </a:pPr>
+            <a:r>
+              <a:rPr sz="1500">
+                <a:solidFill>
+                  <a:srgbClr val="22282E"/>
+                </a:solidFill>
+              </a:rPr>
+              <a:t>•  Riesgo residual — Exposición que permanece después del tratamiento.</a:t>
             </a:r>
           </a:p>
         </p:txBody>
@@ -4465,7 +4976,7 @@
                   <a:srgbClr val="0B3D2E"/>
                 </a:solidFill>
               </a:rPr>
-              <a:t>🧪 Laboratorio guiado — Aplicar un CIS Benchmark con gestión del cambio</a:t>
+              <a:t>✅ Criterio de dominio</a:t>
             </a:r>
           </a:p>
         </p:txBody>
@@ -4503,97 +5014,7 @@
                   <a:srgbClr val="22282E"/>
                 </a:solidFill>
               </a:rPr>
-              <a:t>•  Ejercicio aplicado: endureces una VM siguiendo un CIS Benchmark, controlando el proceso con gestión de configuración y del cambio.</a:t>
-            </a:r>
-          </a:p>
-          <a:p>
-            <a:pPr>
-              <a:spcAft>
-                <a:spcPts val="600"/>
-              </a:spcAft>
-            </a:pPr>
-            <a:r>
-              <a:rPr sz="1500">
-                <a:solidFill>
-                  <a:srgbClr val="22282E"/>
-                </a:solidFill>
-              </a:rPr>
-              <a:t>•  Toma la línea base actual. En la VM aislada, ejecuta un escaneo inicial (CIS-CAT Lite, OpenSCAP o Lynis) y guarda el porcentaje de cumplimiento y los hallazgos. Haz un snapshot.</a:t>
-            </a:r>
-          </a:p>
-          <a:p>
-            <a:pPr>
-              <a:spcAft>
-                <a:spcPts val="600"/>
-              </a:spcAft>
-            </a:pPr>
-            <a:r>
-              <a:rPr sz="1500">
-                <a:solidFill>
-                  <a:srgbClr val="22282E"/>
-                </a:solidFill>
-              </a:rPr>
-              <a:t>•  Selecciona el benchmark y nivel. Descarga el CIS Benchmark de la plataforma y elige nivel (L1 para un servidor de propósito general). Justifica por qué L1 y no L2.</a:t>
-            </a:r>
-          </a:p>
-          <a:p>
-            <a:pPr>
-              <a:spcAft>
-                <a:spcPts val="600"/>
-              </a:spcAft>
-            </a:pPr>
-            <a:r>
-              <a:rPr sz="1500">
-                <a:solidFill>
-                  <a:srgbClr val="22282E"/>
-                </a:solidFill>
-              </a:rPr>
-              <a:t>•  Abre un RFC. Registra el cambio: qué recomendaciones se aplicarán, riesgo, ventana, plan de pruebas y plan de rollback (restaurar snapshot). Simula la aprobación del CAB.</a:t>
-            </a:r>
-          </a:p>
-          <a:p>
-            <a:pPr>
-              <a:spcAft>
-                <a:spcPts val="600"/>
-              </a:spcAft>
-            </a:pPr>
-            <a:r>
-              <a:rPr sz="1500">
-                <a:solidFill>
-                  <a:srgbClr val="22282E"/>
-                </a:solidFill>
-              </a:rPr>
-              <a:t>•  Aplica el hardening por lotes. Implementa un grupo de recomendaciones (p. ej. políticas de contraseña, desactivar servicios innecesarios, cerrar puertos, deshabilitar cuentas por defecto) con Ansible/GPO/DSC —no a mano— para que sea repetible.</a:t>
-            </a:r>
-          </a:p>
-          <a:p>
-            <a:pPr>
-              <a:spcAft>
-                <a:spcPts val="600"/>
-              </a:spcAft>
-            </a:pPr>
-            <a:r>
-              <a:rPr sz="1500">
-                <a:solidFill>
-                  <a:srgbClr val="22282E"/>
-                </a:solidFill>
-              </a:rPr>
-              <a:t>•  Reescanea y compara. Vuelve a medir el cumplimiento y confirma la mejora. Documenta qué recomendaciones no se aplicaron y por qué (excepciones justificadas).</a:t>
-            </a:r>
-          </a:p>
-          <a:p>
-            <a:pPr>
-              <a:spcAft>
-                <a:spcPts val="600"/>
-              </a:spcAft>
-            </a:pPr>
-            <a:r>
-              <a:rPr sz="1500">
-                <a:solidFill>
-                  <a:srgbClr val="22282E"/>
-                </a:solidFill>
-              </a:rPr>
-              <a:t>•  Prueba la funcionalidad. Verifica que los servicios legítimos siguen operando. Si algo se rompe, ejecuta el rollback y ajusta la excepción: así se demuestra el valor de la gestión del cambio.</a:t>
+              <a:t>•  El alumno demuestra dominio cuando explica el diagrama, resuelve el caso con evidencia, declara límites y puede defender por qué su decisión cambia si cambia un supuesto.</a:t>
             </a:r>
           </a:p>
         </p:txBody>
@@ -4644,7 +5065,7 @@
                   <a:srgbClr val="0B3D2E"/>
                 </a:solidFill>
               </a:rPr>
-              <a:t>✍️ Ejercicios</a:t>
+              <a:t>📖 Definiciones y características</a:t>
             </a:r>
           </a:p>
         </p:txBody>
@@ -4682,82 +5103,97 @@
                   <a:srgbClr val="22282E"/>
                 </a:solidFill>
               </a:rPr>
-              <a:t>•  Justifica cuándo elegir CIS nivel L1 y cuándo L2 para tres tipos de servidor.</a:t>
-            </a:r>
-          </a:p>
-          <a:p>
-            <a:pPr>
-              <a:spcAft>
-                <a:spcPts val="600"/>
-              </a:spcAft>
-            </a:pPr>
-            <a:r>
-              <a:rPr sz="1500">
-                <a:solidFill>
-                  <a:srgbClr val="22282E"/>
-                </a:solidFill>
-              </a:rPr>
-              <a:t>•  Redacta un RFC completo (cambio, riesgo, ventana, pruebas, rollback) para desactivar SMBv1 en una flota.</a:t>
-            </a:r>
-          </a:p>
-          <a:p>
-            <a:pPr>
-              <a:spcAft>
-                <a:spcPts val="600"/>
-              </a:spcAft>
-            </a:pPr>
-            <a:r>
-              <a:rPr sz="1500">
-                <a:solidFill>
-                  <a:srgbClr val="22282E"/>
-                </a:solidFill>
-              </a:rPr>
-              <a:t>•  Escribe una tarea de Ansible/GPO que aplique tres recomendaciones de hardening y sea idempotente.</a:t>
-            </a:r>
-          </a:p>
-          <a:p>
-            <a:pPr>
-              <a:spcAft>
-                <a:spcPts val="600"/>
-              </a:spcAft>
-            </a:pPr>
-            <a:r>
-              <a:rPr sz="1500">
-                <a:solidFill>
-                  <a:srgbClr val="22282E"/>
-                </a:solidFill>
-              </a:rPr>
-              <a:t>•  Diseña un flujo de detección de drift: qué se escanea, cada cuánto y cómo se corrige.</a:t>
-            </a:r>
-          </a:p>
-          <a:p>
-            <a:pPr>
-              <a:spcAft>
-                <a:spcPts val="600"/>
-              </a:spcAft>
-            </a:pPr>
-            <a:r>
-              <a:rPr sz="1500">
-                <a:solidFill>
-                  <a:srgbClr val="22282E"/>
-                </a:solidFill>
-              </a:rPr>
-              <a:t>•  Prioriza cinco parches por riesgo (CVSS + explotación + exposición) y define su ventana.</a:t>
-            </a:r>
-          </a:p>
-          <a:p>
-            <a:pPr>
-              <a:spcAft>
-                <a:spcPts val="600"/>
-              </a:spcAft>
-            </a:pPr>
-            <a:r>
-              <a:rPr sz="1500">
-                <a:solidFill>
-                  <a:srgbClr val="22282E"/>
-                </a:solidFill>
-              </a:rPr>
-              <a:t>•  Documenta una excepción de baseline justificada y su compensación (control alternativo).</a:t>
+              <a:t>•  Baseline de seguridad: conjunto mínimo y documentado de ajustes de configuración que define el estado "seguro conocido" de un sistema. Característica clave: es el punto de referencia contra el que se…</a:t>
+            </a:r>
+          </a:p>
+          <a:p>
+            <a:pPr>
+              <a:spcAft>
+                <a:spcPts val="600"/>
+              </a:spcAft>
+            </a:pPr>
+            <a:r>
+              <a:rPr sz="1500">
+                <a:solidFill>
+                  <a:srgbClr val="22282E"/>
+                </a:solidFill>
+              </a:rPr>
+              <a:t>•  CIS Benchmark: guía de hardening consensuada por la comunidad, específica por plataforma (Windows, Linux, navegadores, nube), con recomendaciones justificadas y verificables. Característica clave…</a:t>
+            </a:r>
+          </a:p>
+          <a:p>
+            <a:pPr>
+              <a:spcAft>
+                <a:spcPts val="600"/>
+              </a:spcAft>
+            </a:pPr>
+            <a:r>
+              <a:rPr sz="1500">
+                <a:solidFill>
+                  <a:srgbClr val="22282E"/>
+                </a:solidFill>
+              </a:rPr>
+              <a:t>•  Hardening: proceso de reducir la superficie de ataque —desactivar servicios/puertos innecesarios, cerrar cuentas por defecto, aplicar mínimo privilegio, cifrar. Característica clave: menos funciones…</a:t>
+            </a:r>
+          </a:p>
+          <a:p>
+            <a:pPr>
+              <a:spcAft>
+                <a:spcPts val="600"/>
+              </a:spcAft>
+            </a:pPr>
+            <a:r>
+              <a:rPr sz="1500">
+                <a:solidFill>
+                  <a:srgbClr val="22282E"/>
+                </a:solidFill>
+              </a:rPr>
+              <a:t>•  Configuration drift (deriva): divergencia gradual de la configuración real respecto de la baseline por cambios manuales no controlados. Característica clave: reintroduce riesgo silenciosamente; se…</a:t>
+            </a:r>
+          </a:p>
+          <a:p>
+            <a:pPr>
+              <a:spcAft>
+                <a:spcPts val="600"/>
+              </a:spcAft>
+            </a:pPr>
+            <a:r>
+              <a:rPr sz="1500">
+                <a:solidFill>
+                  <a:srgbClr val="22282E"/>
+                </a:solidFill>
+              </a:rPr>
+              <a:t>•  Gestión de parches: proceso de identificar, priorizar, probar, desplegar y verificar actualizaciones (NIST SP 800-40). Característica clave: no es "instalar todo ya"; prioriza por riesgo y valida…</a:t>
+            </a:r>
+          </a:p>
+          <a:p>
+            <a:pPr>
+              <a:spcAft>
+                <a:spcPts val="600"/>
+              </a:spcAft>
+            </a:pPr>
+            <a:r>
+              <a:rPr sz="1500">
+                <a:solidFill>
+                  <a:srgbClr val="22282E"/>
+                </a:solidFill>
+              </a:rPr>
+              <a:t>•  Gestión del cambio: proceso formal (RFC → evaluación → aprobación del CAB → implementación → verificación → rollback si falla). Característica clave: cada cambio queda autorizado, documentado y…</a:t>
+            </a:r>
+          </a:p>
+          <a:p>
+            <a:pPr>
+              <a:spcAft>
+                <a:spcPts val="600"/>
+              </a:spcAft>
+            </a:pPr>
+            <a:r>
+              <a:rPr sz="1500">
+                <a:solidFill>
+                  <a:srgbClr val="22282E"/>
+                </a:solidFill>
+              </a:rPr>
+              <a:t>•  CAB (Change Advisory Board): comité que evalúa y aprueba cambios según riesgo e impacto. Característica clave: separa la decisión de la ejecución y evita cambios sorpresa en producción.</a:t>
             </a:r>
           </a:p>
         </p:txBody>
@@ -4808,7 +5244,7 @@
                   <a:srgbClr val="0B3D2E"/>
                 </a:solidFill>
               </a:rPr>
-              <a:t>📝 Reto verificable</a:t>
+              <a:t>🧰 Herramientas y preparación</a:t>
             </a:r>
           </a:p>
         </p:txBody>
@@ -4846,97 +5282,82 @@
                   <a:srgbClr val="22282E"/>
                 </a:solidFill>
               </a:rPr>
-              <a:t>•  Reto: entrega el paquete de hardening de una VM controlado por gestión del cambio, con evidencia de mejora y de control de drift.</a:t>
-            </a:r>
-          </a:p>
-          <a:p>
-            <a:pPr>
-              <a:spcAft>
-                <a:spcPts val="600"/>
-              </a:spcAft>
-            </a:pPr>
-            <a:r>
-              <a:rPr sz="1500">
-                <a:solidFill>
-                  <a:srgbClr val="22282E"/>
-                </a:solidFill>
-              </a:rPr>
-              <a:t>•  Criterio de aceptación:</a:t>
-            </a:r>
-          </a:p>
-          <a:p>
-            <a:pPr>
-              <a:spcAft>
-                <a:spcPts val="600"/>
-              </a:spcAft>
-            </a:pPr>
-            <a:r>
-              <a:rPr sz="1500">
-                <a:solidFill>
-                  <a:srgbClr val="22282E"/>
-                </a:solidFill>
-              </a:rPr>
-              <a:t>•  Hay medición de cumplimiento inicial y final contra un CIS Benchmark, con mejora demostrada.</a:t>
-            </a:r>
-          </a:p>
-          <a:p>
-            <a:pPr>
-              <a:spcAft>
-                <a:spcPts val="600"/>
-              </a:spcAft>
-            </a:pPr>
-            <a:r>
-              <a:rPr sz="1500">
-                <a:solidFill>
-                  <a:srgbClr val="22282E"/>
-                </a:solidFill>
-              </a:rPr>
-              <a:t>•  El hardening se aplicó de forma repetible (Ansible/GPO/DSC/IaC), no manual, y la baseline quedó versionada.</a:t>
-            </a:r>
-          </a:p>
-          <a:p>
-            <a:pPr>
-              <a:spcAft>
-                <a:spcPts val="600"/>
-              </a:spcAft>
-            </a:pPr>
-            <a:r>
-              <a:rPr sz="1500">
-                <a:solidFill>
-                  <a:srgbClr val="22282E"/>
-                </a:solidFill>
-              </a:rPr>
-              <a:t>•  Existe un RFC con riesgo, ventana, pruebas y plan de rollback, más una lista de excepciones justificadas.</a:t>
-            </a:r>
-          </a:p>
-          <a:p>
-            <a:pPr>
-              <a:spcAft>
-                <a:spcPts val="600"/>
-              </a:spcAft>
-            </a:pPr>
-            <a:r>
-              <a:rPr sz="1500">
-                <a:solidFill>
-                  <a:srgbClr val="22282E"/>
-                </a:solidFill>
-              </a:rPr>
-              <a:t>•  Se detectó y corrigió al menos un caso de configuration drift desde la fuente de verdad.</a:t>
-            </a:r>
-          </a:p>
-          <a:p>
-            <a:pPr>
-              <a:spcAft>
-                <a:spcPts val="600"/>
-              </a:spcAft>
-            </a:pPr>
-            <a:r>
-              <a:rPr sz="1500">
-                <a:solidFill>
-                  <a:srgbClr val="22282E"/>
-                </a:solidFill>
-              </a:rPr>
-              <a:t>•  El ciclo incluye gestión de parches con priorización por riesgo y ventana documentada (SP 800-40).</a:t>
+              <a:t>•  Entorno de laboratorio propio con máquinas de prueba (nunca producción sin autorización):</a:t>
+            </a:r>
+          </a:p>
+          <a:p>
+            <a:pPr>
+              <a:spcAft>
+                <a:spcPts val="600"/>
+              </a:spcAft>
+            </a:pPr>
+            <a:r>
+              <a:rPr sz="1500">
+                <a:solidFill>
+                  <a:srgbClr val="22282E"/>
+                </a:solidFill>
+              </a:rPr>
+              <a:t>•  VM de prueba (Windows Server o Ubuntu) aislada para aplicar y revertir cambios con snapshots.</a:t>
+            </a:r>
+          </a:p>
+          <a:p>
+            <a:pPr>
+              <a:spcAft>
+                <a:spcPts val="600"/>
+              </a:spcAft>
+            </a:pPr>
+            <a:r>
+              <a:rPr sz="1500">
+                <a:solidFill>
+                  <a:srgbClr val="22282E"/>
+                </a:solidFill>
+              </a:rPr>
+              <a:t>•  CIS Benchmark correspondiente (PDF gratuito) y, si está disponible, CIS-CAT Lite para evaluar cumplimiento automáticamente.</a:t>
+            </a:r>
+          </a:p>
+          <a:p>
+            <a:pPr>
+              <a:spcAft>
+                <a:spcPts val="600"/>
+              </a:spcAft>
+            </a:pPr>
+            <a:r>
+              <a:rPr sz="1500">
+                <a:solidFill>
+                  <a:srgbClr val="22282E"/>
+                </a:solidFill>
+              </a:rPr>
+              <a:t>•  Herramienta de configuración: Ansible/PowerShell DSC o GPO para aplicar el hardening de forma repetible.</a:t>
+            </a:r>
+          </a:p>
+          <a:p>
+            <a:pPr>
+              <a:spcAft>
+                <a:spcPts val="600"/>
+              </a:spcAft>
+            </a:pPr>
+            <a:r>
+              <a:rPr sz="1500">
+                <a:solidFill>
+                  <a:srgbClr val="22282E"/>
+                </a:solidFill>
+              </a:rPr>
+              <a:t>•  Escáner de configuración: OpenSCAP (perfiles SCAP) o Lynis en Linux para medir el estado.</a:t>
+            </a:r>
+          </a:p>
+          <a:p>
+            <a:pPr>
+              <a:spcAft>
+                <a:spcPts val="600"/>
+              </a:spcAft>
+            </a:pPr>
+            <a:r>
+              <a:rPr sz="1500">
+                <a:solidFill>
+                  <a:srgbClr val="22282E"/>
+                </a:solidFill>
+              </a:rPr>
+              <a:t>•  Registro de cambios (RFC) y plantilla de gestión del cambio con plan de rollback.</a:t>
             </a:r>
           </a:p>
         </p:txBody>
